--- a/Advanced Harness Routing Planner.pptx
+++ b/Advanced Harness Routing Planner.pptx
@@ -13,12 +13,13 @@
     <p:sldId id="262" r:id="rId7"/>
     <p:sldId id="263" r:id="rId8"/>
     <p:sldId id="264" r:id="rId9"/>
-    <p:sldId id="265" r:id="rId10"/>
-    <p:sldId id="266" r:id="rId11"/>
-    <p:sldId id="267" r:id="rId12"/>
-    <p:sldId id="268" r:id="rId13"/>
-    <p:sldId id="269" r:id="rId14"/>
-    <p:sldId id="270" r:id="rId15"/>
+    <p:sldId id="271" r:id="rId10"/>
+    <p:sldId id="265" r:id="rId11"/>
+    <p:sldId id="266" r:id="rId12"/>
+    <p:sldId id="267" r:id="rId13"/>
+    <p:sldId id="268" r:id="rId14"/>
+    <p:sldId id="269" r:id="rId15"/>
+    <p:sldId id="270" r:id="rId16"/>
   </p:sldIdLst>
   <p:sldSz cx="12192000" cy="6858000"/>
   <p:notesSz cx="6858000" cy="9144000"/>
@@ -3446,6 +3447,194 @@
           <p:cNvPr id="2" name="Title 1">
             <a:extLst>
               <a:ext uri="{FF2B5EF4-FFF2-40B4-BE49-F238E27FC236}">
+                <a16:creationId xmlns:a16="http://schemas.microsoft.com/office/drawing/2014/main" id="{A9751443-433A-9ECF-CCB3-0FD6E01627A8}"/>
+              </a:ext>
+            </a:extLst>
+          </p:cNvPr>
+          <p:cNvSpPr>
+            <a:spLocks noGrp="1"/>
+          </p:cNvSpPr>
+          <p:nvPr>
+            <p:ph type="title"/>
+          </p:nvPr>
+        </p:nvSpPr>
+        <p:spPr>
+          <a:xfrm>
+            <a:off x="838200" y="365125"/>
+            <a:ext cx="10515600" cy="1034305"/>
+          </a:xfrm>
+        </p:spPr>
+        <p:txBody>
+          <a:bodyPr>
+            <a:normAutofit/>
+          </a:bodyPr>
+          <a:lstStyle/>
+          <a:p>
+            <a:r>
+              <a:rPr lang="en-IN" sz="3200" dirty="0"/>
+              <a:t>Geometry Generation</a:t>
+            </a:r>
+          </a:p>
+        </p:txBody>
+      </p:sp>
+      <p:sp>
+        <p:nvSpPr>
+          <p:cNvPr id="3" name="Content Placeholder 2">
+            <a:extLst>
+              <a:ext uri="{FF2B5EF4-FFF2-40B4-BE49-F238E27FC236}">
+                <a16:creationId xmlns:a16="http://schemas.microsoft.com/office/drawing/2014/main" id="{642A4EF8-8912-10FD-88BC-6B45DFB26CC6}"/>
+              </a:ext>
+            </a:extLst>
+          </p:cNvPr>
+          <p:cNvSpPr>
+            <a:spLocks noGrp="1"/>
+          </p:cNvSpPr>
+          <p:nvPr>
+            <p:ph idx="1"/>
+          </p:nvPr>
+        </p:nvSpPr>
+        <p:spPr>
+          <a:xfrm>
+            <a:off x="838200" y="1216551"/>
+            <a:ext cx="10515600" cy="1184744"/>
+          </a:xfrm>
+        </p:spPr>
+        <p:txBody>
+          <a:bodyPr>
+            <a:normAutofit/>
+          </a:bodyPr>
+          <a:lstStyle/>
+          <a:p>
+            <a:r>
+              <a:rPr lang="en-US" sz="1800" dirty="0"/>
+              <a:t>The refined path is converted into a smooth curve using **B-spline interpolation.</a:t>
+            </a:r>
+          </a:p>
+          <a:p>
+            <a:r>
+              <a:rPr lang="en-US" sz="1800" dirty="0"/>
+              <a:t>The spline is then used to generate the harness branch geometry.</a:t>
+            </a:r>
+          </a:p>
+          <a:p>
+            <a:r>
+              <a:rPr lang="en-US" sz="1800" dirty="0"/>
+              <a:t>This produces a </a:t>
+            </a:r>
+            <a:r>
+              <a:rPr lang="en-US" sz="1800" b="1" dirty="0"/>
+              <a:t>visual and manufacturable harness representation</a:t>
+            </a:r>
+            <a:r>
+              <a:rPr lang="en-US" sz="1800" dirty="0"/>
+              <a:t>.</a:t>
+            </a:r>
+          </a:p>
+          <a:p>
+            <a:endParaRPr lang="en-IN" sz="2000" dirty="0"/>
+          </a:p>
+        </p:txBody>
+      </p:sp>
+      <p:pic>
+        <p:nvPicPr>
+          <p:cNvPr id="5" name="Picture 4">
+            <a:extLst>
+              <a:ext uri="{FF2B5EF4-FFF2-40B4-BE49-F238E27FC236}">
+                <a16:creationId xmlns:a16="http://schemas.microsoft.com/office/drawing/2014/main" id="{91924B09-3E27-C396-59E2-CD057DADC600}"/>
+              </a:ext>
+            </a:extLst>
+          </p:cNvPr>
+          <p:cNvPicPr>
+            <a:picLocks noChangeAspect="1"/>
+          </p:cNvPicPr>
+          <p:nvPr/>
+        </p:nvPicPr>
+        <p:blipFill>
+          <a:blip r:embed="rId2"/>
+          <a:stretch>
+            <a:fillRect/>
+          </a:stretch>
+        </p:blipFill>
+        <p:spPr>
+          <a:xfrm>
+            <a:off x="838200" y="2379315"/>
+            <a:ext cx="4233670" cy="4154782"/>
+          </a:xfrm>
+          <a:prstGeom prst="rect">
+            <a:avLst/>
+          </a:prstGeom>
+        </p:spPr>
+      </p:pic>
+      <p:sp>
+        <p:nvSpPr>
+          <p:cNvPr id="6" name="TextBox 5">
+            <a:extLst>
+              <a:ext uri="{FF2B5EF4-FFF2-40B4-BE49-F238E27FC236}">
+                <a16:creationId xmlns:a16="http://schemas.microsoft.com/office/drawing/2014/main" id="{604A8C97-C156-3034-6271-673B48718CAB}"/>
+              </a:ext>
+            </a:extLst>
+          </p:cNvPr>
+          <p:cNvSpPr txBox="1"/>
+          <p:nvPr/>
+        </p:nvSpPr>
+        <p:spPr>
+          <a:xfrm>
+            <a:off x="5427406" y="5968181"/>
+            <a:ext cx="3731406" cy="369332"/>
+          </a:xfrm>
+          <a:prstGeom prst="rect">
+            <a:avLst/>
+          </a:prstGeom>
+          <a:noFill/>
+        </p:spPr>
+        <p:txBody>
+          <a:bodyPr wrap="none" rtlCol="0">
+            <a:spAutoFit/>
+          </a:bodyPr>
+          <a:lstStyle/>
+          <a:p>
+            <a:r>
+              <a:rPr lang="en-IN" dirty="0"/>
+              <a:t>Fig 4: Branch generation on the spline</a:t>
+            </a:r>
+          </a:p>
+        </p:txBody>
+      </p:sp>
+    </p:spTree>
+    <p:extLst>
+      <p:ext uri="{BB962C8B-B14F-4D97-AF65-F5344CB8AC3E}">
+        <p14:creationId xmlns:p14="http://schemas.microsoft.com/office/powerpoint/2010/main" val="734741610"/>
+      </p:ext>
+    </p:extLst>
+  </p:cSld>
+  <p:clrMapOvr>
+    <a:masterClrMapping/>
+  </p:clrMapOvr>
+</p:sld>
+</file>
+
+<file path=ppt/slides/slide11.xml><?xml version="1.0" encoding="utf-8"?>
+<p:sld xmlns:a="http://schemas.openxmlformats.org/drawingml/2006/main" xmlns:r="http://schemas.openxmlformats.org/officeDocument/2006/relationships" xmlns:p="http://schemas.openxmlformats.org/presentationml/2006/main">
+  <p:cSld>
+    <p:spTree>
+      <p:nvGrpSpPr>
+        <p:cNvPr id="1" name=""/>
+        <p:cNvGrpSpPr/>
+        <p:nvPr/>
+      </p:nvGrpSpPr>
+      <p:grpSpPr>
+        <a:xfrm>
+          <a:off x="0" y="0"/>
+          <a:ext cx="0" cy="0"/>
+          <a:chOff x="0" y="0"/>
+          <a:chExt cx="0" cy="0"/>
+        </a:xfrm>
+      </p:grpSpPr>
+      <p:sp>
+        <p:nvSpPr>
+          <p:cNvPr id="2" name="Title 1">
+            <a:extLst>
+              <a:ext uri="{FF2B5EF4-FFF2-40B4-BE49-F238E27FC236}">
                 <a16:creationId xmlns:a16="http://schemas.microsoft.com/office/drawing/2014/main" id="{5E019879-DFB4-BFC3-6288-DACCF17E8696}"/>
               </a:ext>
             </a:extLst>
@@ -3579,6 +3768,41 @@
           </a:prstGeom>
         </p:spPr>
       </p:pic>
+      <p:sp>
+        <p:nvSpPr>
+          <p:cNvPr id="6" name="TextBox 5">
+            <a:extLst>
+              <a:ext uri="{FF2B5EF4-FFF2-40B4-BE49-F238E27FC236}">
+                <a16:creationId xmlns:a16="http://schemas.microsoft.com/office/drawing/2014/main" id="{C015A055-5E1B-0D9C-7F92-CC3E85C4C829}"/>
+              </a:ext>
+            </a:extLst>
+          </p:cNvPr>
+          <p:cNvSpPr txBox="1"/>
+          <p:nvPr/>
+        </p:nvSpPr>
+        <p:spPr>
+          <a:xfrm>
+            <a:off x="5604387" y="6027174"/>
+            <a:ext cx="4491935" cy="369332"/>
+          </a:xfrm>
+          <a:prstGeom prst="rect">
+            <a:avLst/>
+          </a:prstGeom>
+          <a:noFill/>
+        </p:spPr>
+        <p:txBody>
+          <a:bodyPr wrap="none" rtlCol="0">
+            <a:spAutoFit/>
+          </a:bodyPr>
+          <a:lstStyle/>
+          <a:p>
+            <a:r>
+              <a:rPr lang="en-IN" dirty="0"/>
+              <a:t>Fig 5: Sub Branches created from main branch</a:t>
+            </a:r>
+          </a:p>
+        </p:txBody>
+      </p:sp>
     </p:spTree>
     <p:extLst>
       <p:ext uri="{BB962C8B-B14F-4D97-AF65-F5344CB8AC3E}">
@@ -3592,7 +3816,7 @@
 </p:sld>
 </file>
 
-<file path=ppt/slides/slide11.xml><?xml version="1.0" encoding="utf-8"?>
+<file path=ppt/slides/slide12.xml><?xml version="1.0" encoding="utf-8"?>
 <p:sld xmlns:a="http://schemas.openxmlformats.org/drawingml/2006/main" xmlns:r="http://schemas.openxmlformats.org/officeDocument/2006/relationships" xmlns:p="http://schemas.openxmlformats.org/presentationml/2006/main">
   <p:cSld>
     <p:spTree>
@@ -4070,142 +4294,6 @@
 </p:sld>
 </file>
 
-<file path=ppt/slides/slide12.xml><?xml version="1.0" encoding="utf-8"?>
-<p:sld xmlns:a="http://schemas.openxmlformats.org/drawingml/2006/main" xmlns:r="http://schemas.openxmlformats.org/officeDocument/2006/relationships" xmlns:p="http://schemas.openxmlformats.org/presentationml/2006/main">
-  <p:cSld>
-    <p:spTree>
-      <p:nvGrpSpPr>
-        <p:cNvPr id="1" name=""/>
-        <p:cNvGrpSpPr/>
-        <p:nvPr/>
-      </p:nvGrpSpPr>
-      <p:grpSpPr>
-        <a:xfrm>
-          <a:off x="0" y="0"/>
-          <a:ext cx="0" cy="0"/>
-          <a:chOff x="0" y="0"/>
-          <a:chExt cx="0" cy="0"/>
-        </a:xfrm>
-      </p:grpSpPr>
-      <p:sp>
-        <p:nvSpPr>
-          <p:cNvPr id="2" name="Title 1">
-            <a:extLst>
-              <a:ext uri="{FF2B5EF4-FFF2-40B4-BE49-F238E27FC236}">
-                <a16:creationId xmlns:a16="http://schemas.microsoft.com/office/drawing/2014/main" id="{30315B08-00A4-1925-AF0A-34F2365C4890}"/>
-              </a:ext>
-            </a:extLst>
-          </p:cNvPr>
-          <p:cNvSpPr>
-            <a:spLocks noGrp="1"/>
-          </p:cNvSpPr>
-          <p:nvPr>
-            <p:ph type="title"/>
-          </p:nvPr>
-        </p:nvSpPr>
-        <p:spPr>
-          <a:xfrm>
-            <a:off x="838200" y="365126"/>
-            <a:ext cx="10515600" cy="930938"/>
-          </a:xfrm>
-        </p:spPr>
-        <p:txBody>
-          <a:bodyPr>
-            <a:normAutofit/>
-          </a:bodyPr>
-          <a:lstStyle/>
-          <a:p>
-            <a:r>
-              <a:rPr lang="en-US" sz="3200" dirty="0"/>
-              <a:t>Capabilities Beyond Current CAD Tools</a:t>
-            </a:r>
-            <a:endParaRPr lang="en-IN" sz="3200" dirty="0"/>
-          </a:p>
-        </p:txBody>
-      </p:sp>
-      <p:sp>
-        <p:nvSpPr>
-          <p:cNvPr id="3" name="Content Placeholder 2">
-            <a:extLst>
-              <a:ext uri="{FF2B5EF4-FFF2-40B4-BE49-F238E27FC236}">
-                <a16:creationId xmlns:a16="http://schemas.microsoft.com/office/drawing/2014/main" id="{660423E5-2C35-53B2-4BBD-17A659226D9D}"/>
-              </a:ext>
-            </a:extLst>
-          </p:cNvPr>
-          <p:cNvSpPr>
-            <a:spLocks noGrp="1"/>
-          </p:cNvSpPr>
-          <p:nvPr>
-            <p:ph idx="1"/>
-          </p:nvPr>
-        </p:nvSpPr>
-        <p:spPr>
-          <a:xfrm>
-            <a:off x="838200" y="1216550"/>
-            <a:ext cx="10515600" cy="4960413"/>
-          </a:xfrm>
-        </p:spPr>
-        <p:txBody>
-          <a:bodyPr>
-            <a:normAutofit/>
-          </a:bodyPr>
-          <a:lstStyle/>
-          <a:p>
-            <a:r>
-              <a:rPr lang="en-US" sz="2000" dirty="0"/>
-              <a:t>Current capabilities in CATIA V5 focus primarily on manual modelling and clash detection.</a:t>
-            </a:r>
-          </a:p>
-          <a:p>
-            <a:r>
-              <a:rPr lang="en-US" sz="2000" dirty="0"/>
-              <a:t>The proposed approach adds:</a:t>
-            </a:r>
-          </a:p>
-          <a:p>
-            <a:r>
-              <a:rPr lang="en-US" sz="2000" dirty="0"/>
-              <a:t>• automated path exploration</a:t>
-            </a:r>
-            <a:br>
-              <a:rPr lang="en-US" sz="2000" dirty="0"/>
-            </a:br>
-            <a:r>
-              <a:rPr lang="en-US" sz="2000" dirty="0"/>
-              <a:t>• obstacle-aware route suggestion</a:t>
-            </a:r>
-            <a:br>
-              <a:rPr lang="en-US" sz="2000" dirty="0"/>
-            </a:br>
-            <a:r>
-              <a:rPr lang="en-US" sz="2000" dirty="0"/>
-              <a:t>• rapid routing feasibility checks</a:t>
-            </a:r>
-          </a:p>
-          <a:p>
-            <a:r>
-              <a:rPr lang="en-US" sz="2000" dirty="0"/>
-              <a:t>These capabilities complement existing CAD tools rather than replacing them.</a:t>
-            </a:r>
-          </a:p>
-          <a:p>
-            <a:endParaRPr lang="en-IN" sz="2000" dirty="0"/>
-          </a:p>
-        </p:txBody>
-      </p:sp>
-    </p:spTree>
-    <p:extLst>
-      <p:ext uri="{BB962C8B-B14F-4D97-AF65-F5344CB8AC3E}">
-        <p14:creationId xmlns:p14="http://schemas.microsoft.com/office/powerpoint/2010/main" val="470065584"/>
-      </p:ext>
-    </p:extLst>
-  </p:cSld>
-  <p:clrMapOvr>
-    <a:masterClrMapping/>
-  </p:clrMapOvr>
-</p:sld>
-</file>
-
 <file path=ppt/slides/slide13.xml><?xml version="1.0" encoding="utf-8"?>
 <p:sld xmlns:a="http://schemas.openxmlformats.org/drawingml/2006/main" xmlns:r="http://schemas.openxmlformats.org/officeDocument/2006/relationships" xmlns:p="http://schemas.openxmlformats.org/presentationml/2006/main">
   <p:cSld>
@@ -4228,6 +4316,142 @@
           <p:cNvPr id="2" name="Title 1">
             <a:extLst>
               <a:ext uri="{FF2B5EF4-FFF2-40B4-BE49-F238E27FC236}">
+                <a16:creationId xmlns:a16="http://schemas.microsoft.com/office/drawing/2014/main" id="{30315B08-00A4-1925-AF0A-34F2365C4890}"/>
+              </a:ext>
+            </a:extLst>
+          </p:cNvPr>
+          <p:cNvSpPr>
+            <a:spLocks noGrp="1"/>
+          </p:cNvSpPr>
+          <p:nvPr>
+            <p:ph type="title"/>
+          </p:nvPr>
+        </p:nvSpPr>
+        <p:spPr>
+          <a:xfrm>
+            <a:off x="838200" y="365126"/>
+            <a:ext cx="10515600" cy="930938"/>
+          </a:xfrm>
+        </p:spPr>
+        <p:txBody>
+          <a:bodyPr>
+            <a:normAutofit/>
+          </a:bodyPr>
+          <a:lstStyle/>
+          <a:p>
+            <a:r>
+              <a:rPr lang="en-US" sz="3200" dirty="0"/>
+              <a:t>Capabilities Beyond Current CAD Tools</a:t>
+            </a:r>
+            <a:endParaRPr lang="en-IN" sz="3200" dirty="0"/>
+          </a:p>
+        </p:txBody>
+      </p:sp>
+      <p:sp>
+        <p:nvSpPr>
+          <p:cNvPr id="3" name="Content Placeholder 2">
+            <a:extLst>
+              <a:ext uri="{FF2B5EF4-FFF2-40B4-BE49-F238E27FC236}">
+                <a16:creationId xmlns:a16="http://schemas.microsoft.com/office/drawing/2014/main" id="{660423E5-2C35-53B2-4BBD-17A659226D9D}"/>
+              </a:ext>
+            </a:extLst>
+          </p:cNvPr>
+          <p:cNvSpPr>
+            <a:spLocks noGrp="1"/>
+          </p:cNvSpPr>
+          <p:nvPr>
+            <p:ph idx="1"/>
+          </p:nvPr>
+        </p:nvSpPr>
+        <p:spPr>
+          <a:xfrm>
+            <a:off x="838200" y="1216550"/>
+            <a:ext cx="10515600" cy="4960413"/>
+          </a:xfrm>
+        </p:spPr>
+        <p:txBody>
+          <a:bodyPr>
+            <a:normAutofit/>
+          </a:bodyPr>
+          <a:lstStyle/>
+          <a:p>
+            <a:r>
+              <a:rPr lang="en-US" sz="2000" dirty="0"/>
+              <a:t>Current capabilities in CATIA V5 focus primarily on manual modelling and clash detection.</a:t>
+            </a:r>
+          </a:p>
+          <a:p>
+            <a:r>
+              <a:rPr lang="en-US" sz="2000" dirty="0"/>
+              <a:t>The proposed approach adds:</a:t>
+            </a:r>
+          </a:p>
+          <a:p>
+            <a:r>
+              <a:rPr lang="en-US" sz="2000" dirty="0"/>
+              <a:t>• automated path exploration</a:t>
+            </a:r>
+            <a:br>
+              <a:rPr lang="en-US" sz="2000" dirty="0"/>
+            </a:br>
+            <a:r>
+              <a:rPr lang="en-US" sz="2000" dirty="0"/>
+              <a:t>• obstacle-aware route suggestion</a:t>
+            </a:r>
+            <a:br>
+              <a:rPr lang="en-US" sz="2000" dirty="0"/>
+            </a:br>
+            <a:r>
+              <a:rPr lang="en-US" sz="2000" dirty="0"/>
+              <a:t>• rapid routing feasibility checks</a:t>
+            </a:r>
+          </a:p>
+          <a:p>
+            <a:r>
+              <a:rPr lang="en-US" sz="2000" dirty="0"/>
+              <a:t>These capabilities complement existing CAD tools rather than replacing them.</a:t>
+            </a:r>
+          </a:p>
+          <a:p>
+            <a:endParaRPr lang="en-IN" sz="2000" dirty="0"/>
+          </a:p>
+        </p:txBody>
+      </p:sp>
+    </p:spTree>
+    <p:extLst>
+      <p:ext uri="{BB962C8B-B14F-4D97-AF65-F5344CB8AC3E}">
+        <p14:creationId xmlns:p14="http://schemas.microsoft.com/office/powerpoint/2010/main" val="470065584"/>
+      </p:ext>
+    </p:extLst>
+  </p:cSld>
+  <p:clrMapOvr>
+    <a:masterClrMapping/>
+  </p:clrMapOvr>
+</p:sld>
+</file>
+
+<file path=ppt/slides/slide14.xml><?xml version="1.0" encoding="utf-8"?>
+<p:sld xmlns:a="http://schemas.openxmlformats.org/drawingml/2006/main" xmlns:r="http://schemas.openxmlformats.org/officeDocument/2006/relationships" xmlns:p="http://schemas.openxmlformats.org/presentationml/2006/main">
+  <p:cSld>
+    <p:spTree>
+      <p:nvGrpSpPr>
+        <p:cNvPr id="1" name=""/>
+        <p:cNvGrpSpPr/>
+        <p:nvPr/>
+      </p:nvGrpSpPr>
+      <p:grpSpPr>
+        <a:xfrm>
+          <a:off x="0" y="0"/>
+          <a:ext cx="0" cy="0"/>
+          <a:chOff x="0" y="0"/>
+          <a:chExt cx="0" cy="0"/>
+        </a:xfrm>
+      </p:grpSpPr>
+      <p:sp>
+        <p:nvSpPr>
+          <p:cNvPr id="2" name="Title 1">
+            <a:extLst>
+              <a:ext uri="{FF2B5EF4-FFF2-40B4-BE49-F238E27FC236}">
                 <a16:creationId xmlns:a16="http://schemas.microsoft.com/office/drawing/2014/main" id="{32E74927-1E9F-7833-EF6C-2BF102EF74BF}"/>
               </a:ext>
             </a:extLst>
@@ -4326,7 +4550,7 @@
 </p:sld>
 </file>
 
-<file path=ppt/slides/slide14.xml><?xml version="1.0" encoding="utf-8"?>
+<file path=ppt/slides/slide15.xml><?xml version="1.0" encoding="utf-8"?>
 <p:sld xmlns:a="http://schemas.openxmlformats.org/drawingml/2006/main" xmlns:r="http://schemas.openxmlformats.org/officeDocument/2006/relationships" xmlns:p="http://schemas.openxmlformats.org/presentationml/2006/main">
   <p:cSld>
     <p:spTree>
@@ -4566,67 +4790,79 @@
           <a:lstStyle/>
           <a:p>
             <a:r>
-              <a:rPr lang="en-IN" sz="1700" dirty="0"/>
+              <a:rPr lang="en-IN" sz="1600" dirty="0"/>
               <a:t>Current Designer Workflow</a:t>
             </a:r>
           </a:p>
           <a:p>
             <a:r>
-              <a:rPr lang="en-IN" sz="1700" dirty="0"/>
+              <a:rPr lang="en-IN" sz="1600" dirty="0"/>
               <a:t>Objective</a:t>
             </a:r>
           </a:p>
           <a:p>
             <a:r>
-              <a:rPr lang="en-IN" sz="1700" dirty="0"/>
+              <a:rPr lang="en-IN" sz="1600" dirty="0"/>
               <a:t>Concept</a:t>
             </a:r>
           </a:p>
           <a:p>
             <a:r>
-              <a:rPr lang="en-IN" sz="1700" dirty="0"/>
+              <a:rPr lang="en-IN" sz="1600" dirty="0"/>
               <a:t>Rapidly-exploring Random Tree</a:t>
             </a:r>
           </a:p>
           <a:p>
             <a:r>
-              <a:rPr lang="en-US" sz="1700" dirty="0"/>
+              <a:rPr lang="en-US" sz="1600" dirty="0"/>
               <a:t>Algorithm Enhancements for Harness Routing</a:t>
             </a:r>
           </a:p>
           <a:p>
             <a:r>
-              <a:rPr lang="en-IN" sz="1700" dirty="0"/>
+              <a:rPr lang="en-IN" sz="1600" dirty="0"/>
               <a:t>Path Refinement</a:t>
             </a:r>
           </a:p>
           <a:p>
             <a:r>
-              <a:rPr lang="en-IN" sz="1700" dirty="0"/>
+              <a:rPr lang="en-IN" sz="1600" dirty="0"/>
               <a:t>Geometry Generation</a:t>
             </a:r>
           </a:p>
           <a:p>
             <a:r>
-              <a:rPr lang="en-IN" sz="1700" dirty="0"/>
+              <a:rPr lang="en-IN" sz="1600" dirty="0"/>
               <a:t>Sub-Branch Creation</a:t>
             </a:r>
           </a:p>
           <a:p>
             <a:r>
-              <a:rPr lang="en-IN" sz="1700" dirty="0"/>
+              <a:rPr lang="en-IN" sz="1600" dirty="0"/>
               <a:t>Designer Productivity Improvement (Tentative)</a:t>
             </a:r>
           </a:p>
           <a:p>
             <a:r>
-              <a:rPr lang="en-US" sz="2400" dirty="0"/>
+              <a:rPr lang="en-US" sz="1600" dirty="0"/>
               <a:t>Capabilities Beyond Current CAD Tools</a:t>
             </a:r>
+          </a:p>
+          <a:p>
+            <a:r>
+              <a:rPr lang="en-IN" sz="1600" dirty="0"/>
+              <a:t>Future Improvements/Work</a:t>
+            </a:r>
+          </a:p>
+          <a:p>
+            <a:r>
+              <a:rPr lang="en-IN" sz="1600" dirty="0"/>
+              <a:t>Links and References</a:t>
+            </a:r>
             <a:br>
-              <a:rPr lang="en-IN" sz="2400" dirty="0"/>
+              <a:rPr lang="en-IN" sz="1600" dirty="0"/>
             </a:br>
-            <a:endParaRPr lang="en-IN" dirty="0"/>
+            <a:endParaRPr lang="en-IN" sz="1600" dirty="0"/>
           </a:p>
         </p:txBody>
       </p:sp>
@@ -5174,10 +5410,10 @@
       </p:sp>
       <p:pic>
         <p:nvPicPr>
-          <p:cNvPr id="1028" name="Picture 4" descr="Performance of RRT* Algorithm (1 st Case). | Download Scientific Diagram">
-            <a:extLst>
-              <a:ext uri="{FF2B5EF4-FFF2-40B4-BE49-F238E27FC236}">
-                <a16:creationId xmlns:a16="http://schemas.microsoft.com/office/drawing/2014/main" id="{D3A85EAD-05F9-9590-4151-002453EA3731}"/>
+          <p:cNvPr id="3074" name="Picture 2" descr="An improved artificial potential field with RRT star algorithm for  autonomous vehicle path planning | Scientific Reports">
+            <a:extLst>
+              <a:ext uri="{FF2B5EF4-FFF2-40B4-BE49-F238E27FC236}">
+                <a16:creationId xmlns:a16="http://schemas.microsoft.com/office/drawing/2014/main" id="{3EE3EE5C-D373-4FD2-E8ED-1F43DA96952D}"/>
               </a:ext>
             </a:extLst>
           </p:cNvPr>
@@ -5201,8 +5437,8 @@
         </p:blipFill>
         <p:spPr bwMode="auto">
           <a:xfrm>
-            <a:off x="6703438" y="1331910"/>
-            <a:ext cx="4444290" cy="4194179"/>
+            <a:off x="4320582" y="3830292"/>
+            <a:ext cx="6524625" cy="2457450"/>
           </a:xfrm>
           <a:prstGeom prst="rect">
             <a:avLst/>
@@ -5412,7 +5648,7 @@
         <p:spPr>
           <a:xfrm>
             <a:off x="838200" y="365125"/>
-            <a:ext cx="10515600" cy="891181"/>
+            <a:ext cx="10515600" cy="799759"/>
           </a:xfrm>
         </p:spPr>
         <p:txBody>
@@ -5446,48 +5682,48 @@
         </p:nvSpPr>
         <p:spPr>
           <a:xfrm>
-            <a:off x="838200" y="1371361"/>
+            <a:off x="769374" y="1164884"/>
             <a:ext cx="10515600" cy="1507011"/>
           </a:xfrm>
         </p:spPr>
         <p:txBody>
           <a:bodyPr>
-            <a:normAutofit lnSpcReduction="10000"/>
+            <a:normAutofit/>
           </a:bodyPr>
           <a:lstStyle/>
           <a:p>
             <a:r>
-              <a:rPr lang="en-US" sz="1800" dirty="0"/>
+              <a:rPr lang="en-US" sz="1400" dirty="0"/>
               <a:t>After the initial path is generated, the algorithm performs:</a:t>
             </a:r>
           </a:p>
           <a:p>
             <a:r>
-              <a:rPr lang="en-US" sz="1800" dirty="0"/>
+              <a:rPr lang="en-US" sz="1400" dirty="0"/>
               <a:t>• node reduction</a:t>
             </a:r>
             <a:br>
-              <a:rPr lang="en-US" sz="1800" dirty="0"/>
+              <a:rPr lang="en-US" sz="1400" dirty="0"/>
             </a:br>
             <a:r>
-              <a:rPr lang="en-US" sz="1800" dirty="0"/>
+              <a:rPr lang="en-US" sz="1400" dirty="0"/>
               <a:t>• shortcut </a:t>
             </a:r>
             <a:r>
-              <a:rPr lang="en-US" sz="1800" dirty="0" err="1"/>
+              <a:rPr lang="en-US" sz="1400" dirty="0" err="1"/>
               <a:t>optimisation</a:t>
             </a:r>
             <a:br>
-              <a:rPr lang="en-US" sz="1800" dirty="0"/>
+              <a:rPr lang="en-US" sz="1400" dirty="0"/>
             </a:br>
             <a:r>
-              <a:rPr lang="en-US" sz="1800" dirty="0"/>
+              <a:rPr lang="en-US" sz="1400" dirty="0"/>
               <a:t>• spline smoothing</a:t>
             </a:r>
           </a:p>
           <a:p>
             <a:r>
-              <a:rPr lang="en-US" sz="1800" dirty="0"/>
+              <a:rPr lang="en-US" sz="1400" dirty="0"/>
               <a:t>The resulting route becomes suitable for harness modelling.</a:t>
             </a:r>
           </a:p>
@@ -5496,66 +5732,6 @@
           </a:p>
         </p:txBody>
       </p:sp>
-      <p:pic>
-        <p:nvPicPr>
-          <p:cNvPr id="5" name="Picture 4">
-            <a:extLst>
-              <a:ext uri="{FF2B5EF4-FFF2-40B4-BE49-F238E27FC236}">
-                <a16:creationId xmlns:a16="http://schemas.microsoft.com/office/drawing/2014/main" id="{13DB3705-17D1-666C-5F37-ED9A56D90C57}"/>
-              </a:ext>
-            </a:extLst>
-          </p:cNvPr>
-          <p:cNvPicPr>
-            <a:picLocks noChangeAspect="1"/>
-          </p:cNvPicPr>
-          <p:nvPr/>
-        </p:nvPicPr>
-        <p:blipFill>
-          <a:blip r:embed="rId2"/>
-          <a:stretch>
-            <a:fillRect/>
-          </a:stretch>
-        </p:blipFill>
-        <p:spPr>
-          <a:xfrm>
-            <a:off x="838200" y="2878372"/>
-            <a:ext cx="5279880" cy="3676290"/>
-          </a:xfrm>
-          <a:prstGeom prst="rect">
-            <a:avLst/>
-          </a:prstGeom>
-        </p:spPr>
-      </p:pic>
-      <p:pic>
-        <p:nvPicPr>
-          <p:cNvPr id="9" name="Picture 8">
-            <a:extLst>
-              <a:ext uri="{FF2B5EF4-FFF2-40B4-BE49-F238E27FC236}">
-                <a16:creationId xmlns:a16="http://schemas.microsoft.com/office/drawing/2014/main" id="{64024869-93CF-D68C-7A7A-B40547D0E949}"/>
-              </a:ext>
-            </a:extLst>
-          </p:cNvPr>
-          <p:cNvPicPr>
-            <a:picLocks noChangeAspect="1"/>
-          </p:cNvPicPr>
-          <p:nvPr/>
-        </p:nvPicPr>
-        <p:blipFill>
-          <a:blip r:embed="rId3"/>
-          <a:stretch>
-            <a:fillRect/>
-          </a:stretch>
-        </p:blipFill>
-        <p:spPr>
-          <a:xfrm>
-            <a:off x="6391064" y="2878372"/>
-            <a:ext cx="3744470" cy="3676290"/>
-          </a:xfrm>
-          <a:prstGeom prst="rect">
-            <a:avLst/>
-          </a:prstGeom>
-        </p:spPr>
-      </p:pic>
     </p:spTree>
     <p:extLst>
       <p:ext uri="{BB962C8B-B14F-4D97-AF65-F5344CB8AC3E}">
@@ -5586,105 +5762,12 @@
           <a:chExt cx="0" cy="0"/>
         </a:xfrm>
       </p:grpSpPr>
-      <p:sp>
-        <p:nvSpPr>
-          <p:cNvPr id="2" name="Title 1">
-            <a:extLst>
-              <a:ext uri="{FF2B5EF4-FFF2-40B4-BE49-F238E27FC236}">
-                <a16:creationId xmlns:a16="http://schemas.microsoft.com/office/drawing/2014/main" id="{A9751443-433A-9ECF-CCB3-0FD6E01627A8}"/>
-              </a:ext>
-            </a:extLst>
-          </p:cNvPr>
-          <p:cNvSpPr>
-            <a:spLocks noGrp="1"/>
-          </p:cNvSpPr>
-          <p:nvPr>
-            <p:ph type="title"/>
-          </p:nvPr>
-        </p:nvSpPr>
-        <p:spPr>
-          <a:xfrm>
-            <a:off x="838200" y="365125"/>
-            <a:ext cx="10515600" cy="1034305"/>
-          </a:xfrm>
-        </p:spPr>
-        <p:txBody>
-          <a:bodyPr>
-            <a:normAutofit/>
-          </a:bodyPr>
-          <a:lstStyle/>
-          <a:p>
-            <a:r>
-              <a:rPr lang="en-IN" sz="3200" dirty="0"/>
-              <a:t>Geometry Generation</a:t>
-            </a:r>
-          </a:p>
-        </p:txBody>
-      </p:sp>
-      <p:sp>
-        <p:nvSpPr>
-          <p:cNvPr id="3" name="Content Placeholder 2">
-            <a:extLst>
-              <a:ext uri="{FF2B5EF4-FFF2-40B4-BE49-F238E27FC236}">
-                <a16:creationId xmlns:a16="http://schemas.microsoft.com/office/drawing/2014/main" id="{642A4EF8-8912-10FD-88BC-6B45DFB26CC6}"/>
-              </a:ext>
-            </a:extLst>
-          </p:cNvPr>
-          <p:cNvSpPr>
-            <a:spLocks noGrp="1"/>
-          </p:cNvSpPr>
-          <p:nvPr>
-            <p:ph idx="1"/>
-          </p:nvPr>
-        </p:nvSpPr>
-        <p:spPr>
-          <a:xfrm>
-            <a:off x="838200" y="1216551"/>
-            <a:ext cx="10515600" cy="1184744"/>
-          </a:xfrm>
-        </p:spPr>
-        <p:txBody>
-          <a:bodyPr>
-            <a:normAutofit/>
-          </a:bodyPr>
-          <a:lstStyle/>
-          <a:p>
-            <a:r>
-              <a:rPr lang="en-US" sz="1800" dirty="0"/>
-              <a:t>The refined path is converted into a smooth curve using **B-spline interpolation.</a:t>
-            </a:r>
-          </a:p>
-          <a:p>
-            <a:r>
-              <a:rPr lang="en-US" sz="1800" dirty="0"/>
-              <a:t>The spline is then used to generate the harness branch geometry.</a:t>
-            </a:r>
-          </a:p>
-          <a:p>
-            <a:r>
-              <a:rPr lang="en-US" sz="1800" dirty="0"/>
-              <a:t>This produces a </a:t>
-            </a:r>
-            <a:r>
-              <a:rPr lang="en-US" sz="1800" b="1" dirty="0"/>
-              <a:t>visual and manufacturable harness representation</a:t>
-            </a:r>
-            <a:r>
-              <a:rPr lang="en-US" sz="1800" dirty="0"/>
-              <a:t>.</a:t>
-            </a:r>
-          </a:p>
-          <a:p>
-            <a:endParaRPr lang="en-IN" sz="2000" dirty="0"/>
-          </a:p>
-        </p:txBody>
-      </p:sp>
       <p:pic>
         <p:nvPicPr>
           <p:cNvPr id="5" name="Picture 4">
             <a:extLst>
               <a:ext uri="{FF2B5EF4-FFF2-40B4-BE49-F238E27FC236}">
-                <a16:creationId xmlns:a16="http://schemas.microsoft.com/office/drawing/2014/main" id="{91924B09-3E27-C396-59E2-CD057DADC600}"/>
+                <a16:creationId xmlns:a16="http://schemas.microsoft.com/office/drawing/2014/main" id="{13DB3705-17D1-666C-5F37-ED9A56D90C57}"/>
               </a:ext>
             </a:extLst>
           </p:cNvPr>
@@ -5701,18 +5784,183 @@
         </p:blipFill>
         <p:spPr>
           <a:xfrm>
-            <a:off x="838200" y="2379315"/>
-            <a:ext cx="4233670" cy="4154782"/>
+            <a:off x="816120" y="3244645"/>
+            <a:ext cx="5279880" cy="3125662"/>
           </a:xfrm>
           <a:prstGeom prst="rect">
             <a:avLst/>
           </a:prstGeom>
         </p:spPr>
       </p:pic>
+      <p:pic>
+        <p:nvPicPr>
+          <p:cNvPr id="9" name="Picture 8">
+            <a:extLst>
+              <a:ext uri="{FF2B5EF4-FFF2-40B4-BE49-F238E27FC236}">
+                <a16:creationId xmlns:a16="http://schemas.microsoft.com/office/drawing/2014/main" id="{64024869-93CF-D68C-7A7A-B40547D0E949}"/>
+              </a:ext>
+            </a:extLst>
+          </p:cNvPr>
+          <p:cNvPicPr>
+            <a:picLocks noChangeAspect="1"/>
+          </p:cNvPicPr>
+          <p:nvPr/>
+        </p:nvPicPr>
+        <p:blipFill>
+          <a:blip r:embed="rId3"/>
+          <a:stretch>
+            <a:fillRect/>
+          </a:stretch>
+        </p:blipFill>
+        <p:spPr>
+          <a:xfrm>
+            <a:off x="6943327" y="3244645"/>
+            <a:ext cx="3744470" cy="3125662"/>
+          </a:xfrm>
+          <a:prstGeom prst="rect">
+            <a:avLst/>
+          </a:prstGeom>
+        </p:spPr>
+      </p:pic>
+      <p:pic>
+        <p:nvPicPr>
+          <p:cNvPr id="11" name="Picture 10">
+            <a:extLst>
+              <a:ext uri="{FF2B5EF4-FFF2-40B4-BE49-F238E27FC236}">
+                <a16:creationId xmlns:a16="http://schemas.microsoft.com/office/drawing/2014/main" id="{7330A451-B799-4C4E-1D9F-C4E5E2354435}"/>
+              </a:ext>
+            </a:extLst>
+          </p:cNvPr>
+          <p:cNvPicPr>
+            <a:picLocks noChangeAspect="1"/>
+          </p:cNvPicPr>
+          <p:nvPr/>
+        </p:nvPicPr>
+        <p:blipFill>
+          <a:blip r:embed="rId4"/>
+          <a:stretch>
+            <a:fillRect/>
+          </a:stretch>
+        </p:blipFill>
+        <p:spPr>
+          <a:xfrm>
+            <a:off x="848033" y="175852"/>
+            <a:ext cx="9839764" cy="2537852"/>
+          </a:xfrm>
+          <a:prstGeom prst="rect">
+            <a:avLst/>
+          </a:prstGeom>
+        </p:spPr>
+      </p:pic>
+      <p:sp>
+        <p:nvSpPr>
+          <p:cNvPr id="4" name="TextBox 3">
+            <a:extLst>
+              <a:ext uri="{FF2B5EF4-FFF2-40B4-BE49-F238E27FC236}">
+                <a16:creationId xmlns:a16="http://schemas.microsoft.com/office/drawing/2014/main" id="{CDB26B77-BE94-EF30-A926-C11BB5716FD0}"/>
+              </a:ext>
+            </a:extLst>
+          </p:cNvPr>
+          <p:cNvSpPr txBox="1"/>
+          <p:nvPr/>
+        </p:nvSpPr>
+        <p:spPr>
+          <a:xfrm>
+            <a:off x="816120" y="2794508"/>
+            <a:ext cx="4411272" cy="369332"/>
+          </a:xfrm>
+          <a:prstGeom prst="rect">
+            <a:avLst/>
+          </a:prstGeom>
+          <a:noFill/>
+        </p:spPr>
+        <p:txBody>
+          <a:bodyPr wrap="none" rtlCol="0">
+            <a:spAutoFit/>
+          </a:bodyPr>
+          <a:lstStyle/>
+          <a:p>
+            <a:r>
+              <a:rPr lang="en-IN" dirty="0"/>
+              <a:t>Fig 1: Just the connectors and standard paths</a:t>
+            </a:r>
+          </a:p>
+        </p:txBody>
+      </p:sp>
+      <p:sp>
+        <p:nvSpPr>
+          <p:cNvPr id="6" name="TextBox 5">
+            <a:extLst>
+              <a:ext uri="{FF2B5EF4-FFF2-40B4-BE49-F238E27FC236}">
+                <a16:creationId xmlns:a16="http://schemas.microsoft.com/office/drawing/2014/main" id="{D0DFB297-28F7-2876-0F8D-7AAB12D9C31B}"/>
+              </a:ext>
+            </a:extLst>
+          </p:cNvPr>
+          <p:cNvSpPr txBox="1"/>
+          <p:nvPr/>
+        </p:nvSpPr>
+        <p:spPr>
+          <a:xfrm>
+            <a:off x="816120" y="6451112"/>
+            <a:ext cx="5244769" cy="338554"/>
+          </a:xfrm>
+          <a:prstGeom prst="rect">
+            <a:avLst/>
+          </a:prstGeom>
+          <a:noFill/>
+        </p:spPr>
+        <p:txBody>
+          <a:bodyPr wrap="none" rtlCol="0">
+            <a:spAutoFit/>
+          </a:bodyPr>
+          <a:lstStyle/>
+          <a:p>
+            <a:r>
+              <a:rPr lang="en-IN" sz="1600" dirty="0"/>
+              <a:t>Fig 2: Path generated by RRT, Biasing, Smoothening, Cleaning</a:t>
+            </a:r>
+          </a:p>
+        </p:txBody>
+      </p:sp>
+      <p:sp>
+        <p:nvSpPr>
+          <p:cNvPr id="7" name="TextBox 6">
+            <a:extLst>
+              <a:ext uri="{FF2B5EF4-FFF2-40B4-BE49-F238E27FC236}">
+                <a16:creationId xmlns:a16="http://schemas.microsoft.com/office/drawing/2014/main" id="{25020B3B-6C06-5582-FA9E-7FE8E5286D39}"/>
+              </a:ext>
+            </a:extLst>
+          </p:cNvPr>
+          <p:cNvSpPr txBox="1"/>
+          <p:nvPr/>
+        </p:nvSpPr>
+        <p:spPr>
+          <a:xfrm>
+            <a:off x="6943327" y="6451771"/>
+            <a:ext cx="4225452" cy="338554"/>
+          </a:xfrm>
+          <a:prstGeom prst="rect">
+            <a:avLst/>
+          </a:prstGeom>
+          <a:noFill/>
+        </p:spPr>
+        <p:txBody>
+          <a:bodyPr wrap="none" rtlCol="0">
+            <a:spAutoFit/>
+          </a:bodyPr>
+          <a:lstStyle/>
+          <a:p>
+            <a:r>
+              <a:rPr lang="en-IN" sz="1600" dirty="0"/>
+              <a:t>Fig 3: B-Spline generating after cleaning the path</a:t>
+            </a:r>
+          </a:p>
+        </p:txBody>
+      </p:sp>
     </p:spTree>
     <p:extLst>
       <p:ext uri="{BB962C8B-B14F-4D97-AF65-F5344CB8AC3E}">
-        <p14:creationId xmlns:p14="http://schemas.microsoft.com/office/powerpoint/2010/main" val="734741610"/>
+        <p14:creationId xmlns:p14="http://schemas.microsoft.com/office/powerpoint/2010/main" val="3503292344"/>
       </p:ext>
     </p:extLst>
   </p:cSld>
